--- a/public/fun/cards/care/care-47.pptx
+++ b/public/fun/cards/care/care-47.pptx
@@ -3085,7 +3085,7 @@
     <p:bg>
       <p:bgPr>
         <a:solidFill>
-          <a:srgbClr val="1B2041"/>
+          <a:srgbClr val="0E1116"/>
         </a:solidFill>
         <a:effectLst/>
       </p:bgPr>
@@ -3099,399 +3099,14 @@
       <p:grpSpPr/>
       <p:sp>
         <p:nvSpPr>
-          <p:cNvPr id="2" name="Rectangle 1"/>
+          <p:cNvPr id="2" name="Freeform 1"/>
           <p:cNvSpPr/>
           <p:nvPr/>
         </p:nvSpPr>
         <p:spPr>
           <a:xfrm>
-            <a:off x="93600" y="93600"/>
-            <a:ext cx="3052800" cy="1612800"/>
-          </a:xfrm>
-          <a:prstGeom prst="rect">
-            <a:avLst/>
-          </a:prstGeom>
-          <a:noFill/>
-          <a:ln w="10800">
-            <a:solidFill>
-              <a:srgbClr val="7078AB"/>
-            </a:solidFill>
-          </a:ln>
-        </p:spPr>
-        <p:txBody>
-          <a:bodyPr rtlCol="0" anchor="ctr"/>
-          <a:lstStyle/>
-          <a:p>
-            <a:pPr algn="ctr"/>
-          </a:p>
-        </p:txBody>
-      </p:sp>
-      <p:sp>
-        <p:nvSpPr>
-          <p:cNvPr id="3" name="Rectangle 2"/>
-          <p:cNvSpPr/>
-          <p:nvPr/>
-        </p:nvSpPr>
-        <p:spPr>
-          <a:xfrm>
-            <a:off x="144000" y="144000"/>
-            <a:ext cx="2952000" cy="1512000"/>
-          </a:xfrm>
-          <a:prstGeom prst="rect">
-            <a:avLst/>
-          </a:prstGeom>
-          <a:noFill/>
-          <a:ln w="5400">
-            <a:solidFill>
-              <a:srgbClr val="3F445F"/>
-            </a:solidFill>
-          </a:ln>
-        </p:spPr>
-        <p:txBody>
-          <a:bodyPr rtlCol="0" anchor="ctr"/>
-          <a:lstStyle/>
-          <a:p>
-            <a:pPr algn="ctr"/>
-          </a:p>
-        </p:txBody>
-      </p:sp>
-      <p:sp>
-        <p:nvSpPr>
-          <p:cNvPr id="4" name="텍스트"/>
-          <p:cNvSpPr txBox="1"/>
-          <p:nvPr/>
-        </p:nvSpPr>
-        <p:spPr>
-          <a:xfrm>
-            <a:off x="360000" y="280800"/>
-            <a:ext cx="2520000" cy="100800"/>
-          </a:xfrm>
-          <a:prstGeom prst="rect">
-            <a:avLst/>
-          </a:prstGeom>
-          <a:noFill/>
-        </p:spPr>
-        <p:txBody>
-          <a:bodyPr wrap="square" lIns="0" rIns="0" tIns="0" bIns="0" anchor="t">
-            <a:spAutoFit/>
-          </a:bodyPr>
-          <a:lstStyle/>
-          <a:p>
-            <a:pPr algn="ctr">
-              <a:lnSpc>
-                <a:spcPts val="1015"/>
-              </a:lnSpc>
-            </a:pPr>
-            <a:r>
-              <a:rPr sz="700" b="1" spc="400">
-                <a:solidFill>
-                  <a:srgbClr val="AFB1BC"/>
-                </a:solidFill>
-                <a:latin typeface="맑은 고딕"/>
-                <a:ea typeface="맑은 고딕"/>
-              </a:rPr>
-              <a:t>의원 · 약국 이름</a:t>
-            </a:r>
-          </a:p>
-        </p:txBody>
-      </p:sp>
-      <p:sp>
-        <p:nvSpPr>
-          <p:cNvPr id="5" name="텍스트"/>
-          <p:cNvSpPr txBox="1"/>
-          <p:nvPr/>
-        </p:nvSpPr>
-        <p:spPr>
-          <a:xfrm>
-            <a:off x="360000" y="468000"/>
-            <a:ext cx="2520000" cy="313692"/>
-          </a:xfrm>
-          <a:prstGeom prst="rect">
-            <a:avLst/>
-          </a:prstGeom>
-          <a:noFill/>
-        </p:spPr>
-        <p:txBody>
-          <a:bodyPr wrap="square" lIns="0" rIns="0" tIns="0" bIns="0" anchor="t">
-            <a:spAutoFit/>
-          </a:bodyPr>
-          <a:lstStyle/>
-          <a:p>
-            <a:pPr algn="ctr">
-              <a:lnSpc>
-                <a:spcPts val="2755"/>
-              </a:lnSpc>
-            </a:pPr>
-            <a:r>
-              <a:rPr sz="1900" b="1" spc="50">
-                <a:solidFill>
-                  <a:srgbClr val="FFFFFF"/>
-                </a:solidFill>
-                <a:latin typeface="맑은 고딕"/>
-                <a:ea typeface="맑은 고딕"/>
-              </a:rPr>
-              <a:t>범채원</a:t>
-            </a:r>
-          </a:p>
-        </p:txBody>
-      </p:sp>
-      <p:sp>
-        <p:nvSpPr>
-          <p:cNvPr id="6" name="텍스트"/>
-          <p:cNvSpPr txBox="1"/>
-          <p:nvPr/>
-        </p:nvSpPr>
-        <p:spPr>
-          <a:xfrm>
-            <a:off x="360000" y="784800"/>
-            <a:ext cx="2520000" cy="122400"/>
-          </a:xfrm>
-          <a:prstGeom prst="rect">
-            <a:avLst/>
-          </a:prstGeom>
-          <a:noFill/>
-        </p:spPr>
-        <p:txBody>
-          <a:bodyPr wrap="square" lIns="0" rIns="0" tIns="0" bIns="0" anchor="t">
-            <a:spAutoFit/>
-          </a:bodyPr>
-          <a:lstStyle/>
-          <a:p>
-            <a:pPr algn="ctr">
-              <a:lnSpc>
-                <a:spcPts val="1232"/>
-              </a:lnSpc>
-            </a:pPr>
-            <a:r>
-              <a:rPr sz="850" b="1">
-                <a:solidFill>
-                  <a:srgbClr val="858CB8"/>
-                </a:solidFill>
-                <a:latin typeface="맑은 고딕"/>
-                <a:ea typeface="맑은 고딕"/>
-              </a:rPr>
-              <a:t>치과위생사</a:t>
-            </a:r>
-          </a:p>
-        </p:txBody>
-      </p:sp>
-      <p:sp>
-        <p:nvSpPr>
-          <p:cNvPr id="7" name="Rectangle 6"/>
-          <p:cNvSpPr/>
-          <p:nvPr/>
-        </p:nvSpPr>
-        <p:spPr>
-          <a:xfrm>
-            <a:off x="1530000" y="993600"/>
-            <a:ext cx="180000" cy="10800"/>
-          </a:xfrm>
-          <a:prstGeom prst="rect">
-            <a:avLst/>
-          </a:prstGeom>
-          <a:solidFill>
-            <a:srgbClr val="7078AB"/>
-          </a:solidFill>
-          <a:ln>
-            <a:noFill/>
-          </a:ln>
-        </p:spPr>
-        <p:txBody>
-          <a:bodyPr rtlCol="0" anchor="ctr"/>
-          <a:lstStyle/>
-          <a:p>
-            <a:pPr algn="ctr"/>
-          </a:p>
-        </p:txBody>
-      </p:sp>
-      <p:sp>
-        <p:nvSpPr>
-          <p:cNvPr id="8" name="텍스트"/>
-          <p:cNvSpPr txBox="1"/>
-          <p:nvPr/>
-        </p:nvSpPr>
-        <p:spPr>
-          <a:xfrm>
-            <a:off x="360000" y="1087200"/>
-            <a:ext cx="2520000" cy="108000"/>
-          </a:xfrm>
-          <a:prstGeom prst="rect">
-            <a:avLst/>
-          </a:prstGeom>
-          <a:noFill/>
-        </p:spPr>
-        <p:txBody>
-          <a:bodyPr wrap="square" lIns="0" rIns="0" tIns="0" bIns="0" anchor="t">
-            <a:spAutoFit/>
-          </a:bodyPr>
-          <a:lstStyle/>
-          <a:p>
-            <a:pPr algn="ctr">
-              <a:lnSpc>
-                <a:spcPts val="1087"/>
-              </a:lnSpc>
-            </a:pPr>
-            <a:r>
-              <a:rPr sz="750" b="0">
-                <a:solidFill>
-                  <a:srgbClr val="FFFFFF"/>
-                </a:solidFill>
-                <a:latin typeface="맑은 고딕"/>
-                <a:ea typeface="맑은 고딕"/>
-              </a:rPr>
-              <a:t>010-1234-5678</a:t>
-            </a:r>
-          </a:p>
-        </p:txBody>
-      </p:sp>
-      <p:sp>
-        <p:nvSpPr>
-          <p:cNvPr id="9" name="텍스트"/>
-          <p:cNvSpPr txBox="1"/>
-          <p:nvPr/>
-        </p:nvSpPr>
-        <p:spPr>
-          <a:xfrm>
-            <a:off x="360000" y="1209600"/>
-            <a:ext cx="2520000" cy="108000"/>
-          </a:xfrm>
-          <a:prstGeom prst="rect">
-            <a:avLst/>
-          </a:prstGeom>
-          <a:noFill/>
-        </p:spPr>
-        <p:txBody>
-          <a:bodyPr wrap="square" lIns="0" rIns="0" tIns="0" bIns="0" anchor="t">
-            <a:spAutoFit/>
-          </a:bodyPr>
-          <a:lstStyle/>
-          <a:p>
-            <a:pPr algn="ctr">
-              <a:lnSpc>
-                <a:spcPts val="1087"/>
-              </a:lnSpc>
-            </a:pPr>
-            <a:r>
-              <a:rPr sz="750" b="0">
-                <a:solidFill>
-                  <a:srgbClr val="FFFFFF"/>
-                </a:solidFill>
-                <a:latin typeface="맑은 고딕"/>
-                <a:ea typeface="맑은 고딕"/>
-              </a:rPr>
-              <a:t>name@example.com</a:t>
-            </a:r>
-          </a:p>
-        </p:txBody>
-      </p:sp>
-      <p:sp>
-        <p:nvSpPr>
-          <p:cNvPr id="10" name="텍스트"/>
-          <p:cNvSpPr txBox="1"/>
-          <p:nvPr/>
-        </p:nvSpPr>
-        <p:spPr>
-          <a:xfrm>
-            <a:off x="360000" y="1332000"/>
-            <a:ext cx="2520000" cy="108000"/>
-          </a:xfrm>
-          <a:prstGeom prst="rect">
-            <a:avLst/>
-          </a:prstGeom>
-          <a:noFill/>
-        </p:spPr>
-        <p:txBody>
-          <a:bodyPr wrap="square" lIns="0" rIns="0" tIns="0" bIns="0" anchor="t">
-            <a:spAutoFit/>
-          </a:bodyPr>
-          <a:lstStyle/>
-          <a:p>
-            <a:pPr algn="ctr">
-              <a:lnSpc>
-                <a:spcPts val="1015"/>
-              </a:lnSpc>
-            </a:pPr>
-            <a:r>
-              <a:rPr sz="700" b="0">
-                <a:solidFill>
-                  <a:srgbClr val="AFB1BC"/>
-                </a:solidFill>
-                <a:latin typeface="맑은 고딕"/>
-                <a:ea typeface="맑은 고딕"/>
-              </a:rPr>
-              <a:t>주소를 입력해 주세요</a:t>
-            </a:r>
-          </a:p>
-        </p:txBody>
-      </p:sp>
-      <p:sp>
-        <p:nvSpPr>
-          <p:cNvPr id="11" name="Oval 10"/>
-          <p:cNvSpPr/>
-          <p:nvPr/>
-        </p:nvSpPr>
-        <p:spPr>
-          <a:xfrm>
-            <a:off x="1573488" y="1508328"/>
-            <a:ext cx="51984" cy="51984"/>
-          </a:xfrm>
-          <a:prstGeom prst="ellipse">
-            <a:avLst/>
-          </a:prstGeom>
-          <a:solidFill>
-            <a:srgbClr val="7078AB"/>
-          </a:solidFill>
-          <a:ln>
-            <a:noFill/>
-          </a:ln>
-        </p:spPr>
-        <p:txBody>
-          <a:bodyPr rtlCol="0" anchor="ctr"/>
-          <a:lstStyle/>
-          <a:p>
-            <a:pPr algn="ctr"/>
-          </a:p>
-        </p:txBody>
-      </p:sp>
-      <p:sp>
-        <p:nvSpPr>
-          <p:cNvPr id="12" name="Oval 11"/>
-          <p:cNvSpPr/>
-          <p:nvPr/>
-        </p:nvSpPr>
-        <p:spPr>
-          <a:xfrm>
-            <a:off x="1614528" y="1508328"/>
-            <a:ext cx="51984" cy="51984"/>
-          </a:xfrm>
-          <a:prstGeom prst="ellipse">
-            <a:avLst/>
-          </a:prstGeom>
-          <a:solidFill>
-            <a:srgbClr val="7078AB"/>
-          </a:solidFill>
-          <a:ln>
-            <a:noFill/>
-          </a:ln>
-        </p:spPr>
-        <p:txBody>
-          <a:bodyPr rtlCol="0" anchor="ctr"/>
-          <a:lstStyle/>
-          <a:p>
-            <a:pPr algn="ctr"/>
-          </a:p>
-        </p:txBody>
-      </p:sp>
-      <p:sp>
-        <p:nvSpPr>
-          <p:cNvPr id="13" name="Freeform 12"/>
-          <p:cNvSpPr/>
-          <p:nvPr/>
-        </p:nvSpPr>
-        <p:spPr>
-          <a:xfrm>
-            <a:off x="1574856" y="1545264"/>
-            <a:ext cx="90288" cy="57456"/>
+            <a:off x="2016000" y="0"/>
+            <a:ext cx="1224000" cy="1800000"/>
           </a:xfrm>
           <a:custGeom>
             <a:avLst/>
@@ -3500,22 +3115,25 @@
             <a:cxnLst/>
             <a:rect l="l" t="t" r="r" b="b"/>
             <a:pathLst>
-              <a:path w="90288" h="57456">
+              <a:path w="1224000" h="1800000">
                 <a:moveTo>
-                  <a:pt x="0" y="0"/>
+                  <a:pt x="360000" y="0"/>
                 </a:moveTo>
                 <a:lnTo>
-                  <a:pt x="90288" y="0"/>
+                  <a:pt x="1224000" y="0"/>
                 </a:lnTo>
                 <a:lnTo>
-                  <a:pt x="45144" y="57456"/>
+                  <a:pt x="1224000" y="1800000"/>
+                </a:lnTo>
+                <a:lnTo>
+                  <a:pt x="0" y="1800000"/>
                 </a:lnTo>
                 <a:close/>
               </a:path>
             </a:pathLst>
           </a:custGeom>
           <a:solidFill>
-            <a:srgbClr val="7078AB"/>
+            <a:srgbClr val="FF8A7A"/>
           </a:solidFill>
           <a:ln>
             <a:noFill/>
@@ -3526,6 +3144,445 @@
           <a:lstStyle/>
           <a:p>
             <a:pPr algn="ctr"/>
+          </a:p>
+        </p:txBody>
+      </p:sp>
+      <p:sp>
+        <p:nvSpPr>
+          <p:cNvPr id="3" name="Freeform 2"/>
+          <p:cNvSpPr/>
+          <p:nvPr/>
+        </p:nvSpPr>
+        <p:spPr>
+          <a:xfrm>
+            <a:off x="1864800" y="0"/>
+            <a:ext cx="460800" cy="1800000"/>
+          </a:xfrm>
+          <a:custGeom>
+            <a:avLst/>
+            <a:gdLst/>
+            <a:ahLst/>
+            <a:cxnLst/>
+            <a:rect l="l" t="t" r="r" b="b"/>
+            <a:pathLst>
+              <a:path w="460800" h="1800000">
+                <a:moveTo>
+                  <a:pt x="360000" y="0"/>
+                </a:moveTo>
+                <a:lnTo>
+                  <a:pt x="460800" y="0"/>
+                </a:lnTo>
+                <a:lnTo>
+                  <a:pt x="100800" y="1800000"/>
+                </a:lnTo>
+                <a:lnTo>
+                  <a:pt x="0" y="1800000"/>
+                </a:lnTo>
+                <a:close/>
+              </a:path>
+            </a:pathLst>
+          </a:custGeom>
+          <a:solidFill>
+            <a:srgbClr val="26292D"/>
+          </a:solidFill>
+          <a:ln>
+            <a:noFill/>
+          </a:ln>
+        </p:spPr>
+        <p:txBody>
+          <a:bodyPr rtlCol="0" anchor="ctr"/>
+          <a:lstStyle/>
+          <a:p>
+            <a:pPr algn="ctr"/>
+          </a:p>
+        </p:txBody>
+      </p:sp>
+      <p:sp>
+        <p:nvSpPr>
+          <p:cNvPr id="4" name="텍스트"/>
+          <p:cNvSpPr txBox="1"/>
+          <p:nvPr/>
+        </p:nvSpPr>
+        <p:spPr>
+          <a:xfrm>
+            <a:off x="252000" y="223200"/>
+            <a:ext cx="1440000" cy="133351"/>
+          </a:xfrm>
+          <a:prstGeom prst="rect">
+            <a:avLst/>
+          </a:prstGeom>
+          <a:noFill/>
+        </p:spPr>
+        <p:txBody>
+          <a:bodyPr wrap="square" lIns="0" rIns="0" tIns="0" bIns="0" anchor="t">
+            <a:spAutoFit/>
+          </a:bodyPr>
+          <a:lstStyle/>
+          <a:p>
+            <a:pPr algn="l">
+              <a:lnSpc>
+                <a:spcPts val="1015"/>
+              </a:lnSpc>
+            </a:pPr>
+            <a:r>
+              <a:rPr sz="700" b="1" spc="200">
+                <a:solidFill>
+                  <a:srgbClr val="A3A9B5"/>
+                </a:solidFill>
+                <a:latin typeface="맑은 고딕"/>
+                <a:ea typeface="맑은 고딕"/>
+              </a:rPr>
+              <a:t>의원 · 약국 이름</a:t>
+            </a:r>
+          </a:p>
+        </p:txBody>
+      </p:sp>
+      <p:sp>
+        <p:nvSpPr>
+          <p:cNvPr id="5" name="텍스트"/>
+          <p:cNvSpPr txBox="1"/>
+          <p:nvPr/>
+        </p:nvSpPr>
+        <p:spPr>
+          <a:xfrm>
+            <a:off x="252000" y="540000"/>
+            <a:ext cx="1584000" cy="360000"/>
+          </a:xfrm>
+          <a:prstGeom prst="rect">
+            <a:avLst/>
+          </a:prstGeom>
+          <a:noFill/>
+        </p:spPr>
+        <p:txBody>
+          <a:bodyPr wrap="square" lIns="0" rIns="0" tIns="0" bIns="0" anchor="t">
+            <a:spAutoFit/>
+          </a:bodyPr>
+          <a:lstStyle/>
+          <a:p>
+            <a:pPr algn="l">
+              <a:lnSpc>
+                <a:spcPts val="3190"/>
+              </a:lnSpc>
+            </a:pPr>
+            <a:r>
+              <a:rPr sz="2200" b="1">
+                <a:solidFill>
+                  <a:srgbClr val="FFFFFF"/>
+                </a:solidFill>
+                <a:latin typeface="맑은 고딕"/>
+                <a:ea typeface="맑은 고딕"/>
+              </a:rPr>
+              <a:t>범채원</a:t>
+            </a:r>
+          </a:p>
+        </p:txBody>
+      </p:sp>
+      <p:sp>
+        <p:nvSpPr>
+          <p:cNvPr id="6" name="텍스트"/>
+          <p:cNvSpPr txBox="1"/>
+          <p:nvPr/>
+        </p:nvSpPr>
+        <p:spPr>
+          <a:xfrm>
+            <a:off x="252000" y="943200"/>
+            <a:ext cx="1584000" cy="171451"/>
+          </a:xfrm>
+          <a:prstGeom prst="rect">
+            <a:avLst/>
+          </a:prstGeom>
+          <a:noFill/>
+        </p:spPr>
+        <p:txBody>
+          <a:bodyPr wrap="square" lIns="0" rIns="0" tIns="0" bIns="0" anchor="t">
+            <a:spAutoFit/>
+          </a:bodyPr>
+          <a:lstStyle/>
+          <a:p>
+            <a:pPr algn="l">
+              <a:lnSpc>
+                <a:spcPts val="1305"/>
+              </a:lnSpc>
+            </a:pPr>
+            <a:r>
+              <a:rPr sz="900" b="0">
+                <a:solidFill>
+                  <a:srgbClr val="A3A9B5"/>
+                </a:solidFill>
+                <a:latin typeface="맑은 고딕"/>
+                <a:ea typeface="맑은 고딕"/>
+              </a:rPr>
+              <a:t>치과위생사</a:t>
+            </a:r>
+          </a:p>
+        </p:txBody>
+      </p:sp>
+      <p:sp>
+        <p:nvSpPr>
+          <p:cNvPr id="7" name="Rectangle 6"/>
+          <p:cNvSpPr/>
+          <p:nvPr/>
+        </p:nvSpPr>
+        <p:spPr>
+          <a:xfrm>
+            <a:off x="252000" y="1195200"/>
+            <a:ext cx="144000" cy="18000"/>
+          </a:xfrm>
+          <a:prstGeom prst="rect">
+            <a:avLst/>
+          </a:prstGeom>
+          <a:solidFill>
+            <a:srgbClr val="FF8A7A"/>
+          </a:solidFill>
+          <a:ln>
+            <a:noFill/>
+          </a:ln>
+        </p:spPr>
+        <p:txBody>
+          <a:bodyPr rtlCol="0" anchor="ctr"/>
+          <a:lstStyle/>
+          <a:p>
+            <a:pPr algn="ctr"/>
+          </a:p>
+        </p:txBody>
+      </p:sp>
+      <p:sp>
+        <p:nvSpPr>
+          <p:cNvPr id="8" name="텍스트"/>
+          <p:cNvSpPr txBox="1"/>
+          <p:nvPr/>
+        </p:nvSpPr>
+        <p:spPr>
+          <a:xfrm>
+            <a:off x="252000" y="1328400"/>
+            <a:ext cx="331200" cy="99061"/>
+          </a:xfrm>
+          <a:prstGeom prst="rect">
+            <a:avLst/>
+          </a:prstGeom>
+          <a:noFill/>
+        </p:spPr>
+        <p:txBody>
+          <a:bodyPr wrap="square" lIns="0" rIns="0" tIns="0" bIns="0" anchor="t">
+            <a:spAutoFit/>
+          </a:bodyPr>
+          <a:lstStyle/>
+          <a:p>
+            <a:pPr algn="l">
+              <a:lnSpc>
+                <a:spcPts val="754"/>
+              </a:lnSpc>
+            </a:pPr>
+            <a:r>
+              <a:rPr sz="520" b="1" spc="120">
+                <a:solidFill>
+                  <a:srgbClr val="A3A9B5"/>
+                </a:solidFill>
+                <a:latin typeface="맑은 고딕"/>
+                <a:ea typeface="맑은 고딕"/>
+              </a:rPr>
+              <a:t>TEL</a:t>
+            </a:r>
+          </a:p>
+        </p:txBody>
+      </p:sp>
+      <p:sp>
+        <p:nvSpPr>
+          <p:cNvPr id="9" name="텍스트"/>
+          <p:cNvSpPr txBox="1"/>
+          <p:nvPr/>
+        </p:nvSpPr>
+        <p:spPr>
+          <a:xfrm>
+            <a:off x="583200" y="1317600"/>
+            <a:ext cx="1188000" cy="125731"/>
+          </a:xfrm>
+          <a:prstGeom prst="rect">
+            <a:avLst/>
+          </a:prstGeom>
+          <a:noFill/>
+        </p:spPr>
+        <p:txBody>
+          <a:bodyPr wrap="square" lIns="0" rIns="0" tIns="0" bIns="0" anchor="t">
+            <a:spAutoFit/>
+          </a:bodyPr>
+          <a:lstStyle/>
+          <a:p>
+            <a:pPr algn="l">
+              <a:lnSpc>
+                <a:spcPts val="956"/>
+              </a:lnSpc>
+            </a:pPr>
+            <a:r>
+              <a:rPr sz="660" b="0">
+                <a:solidFill>
+                  <a:srgbClr val="FFFFFF"/>
+                </a:solidFill>
+                <a:latin typeface="맑은 고딕"/>
+                <a:ea typeface="맑은 고딕"/>
+              </a:rPr>
+              <a:t>010-1234-5678</a:t>
+            </a:r>
+          </a:p>
+        </p:txBody>
+      </p:sp>
+      <p:sp>
+        <p:nvSpPr>
+          <p:cNvPr id="10" name="텍스트"/>
+          <p:cNvSpPr txBox="1"/>
+          <p:nvPr/>
+        </p:nvSpPr>
+        <p:spPr>
+          <a:xfrm>
+            <a:off x="252000" y="1458000"/>
+            <a:ext cx="331200" cy="99061"/>
+          </a:xfrm>
+          <a:prstGeom prst="rect">
+            <a:avLst/>
+          </a:prstGeom>
+          <a:noFill/>
+        </p:spPr>
+        <p:txBody>
+          <a:bodyPr wrap="square" lIns="0" rIns="0" tIns="0" bIns="0" anchor="t">
+            <a:spAutoFit/>
+          </a:bodyPr>
+          <a:lstStyle/>
+          <a:p>
+            <a:pPr algn="l">
+              <a:lnSpc>
+                <a:spcPts val="754"/>
+              </a:lnSpc>
+            </a:pPr>
+            <a:r>
+              <a:rPr sz="520" b="1" spc="120">
+                <a:solidFill>
+                  <a:srgbClr val="A3A9B5"/>
+                </a:solidFill>
+                <a:latin typeface="맑은 고딕"/>
+                <a:ea typeface="맑은 고딕"/>
+              </a:rPr>
+              <a:t>MAIL</a:t>
+            </a:r>
+          </a:p>
+        </p:txBody>
+      </p:sp>
+      <p:sp>
+        <p:nvSpPr>
+          <p:cNvPr id="11" name="텍스트"/>
+          <p:cNvSpPr txBox="1"/>
+          <p:nvPr/>
+        </p:nvSpPr>
+        <p:spPr>
+          <a:xfrm>
+            <a:off x="583200" y="1447200"/>
+            <a:ext cx="1188000" cy="125731"/>
+          </a:xfrm>
+          <a:prstGeom prst="rect">
+            <a:avLst/>
+          </a:prstGeom>
+          <a:noFill/>
+        </p:spPr>
+        <p:txBody>
+          <a:bodyPr wrap="square" lIns="0" rIns="0" tIns="0" bIns="0" anchor="t">
+            <a:spAutoFit/>
+          </a:bodyPr>
+          <a:lstStyle/>
+          <a:p>
+            <a:pPr algn="l">
+              <a:lnSpc>
+                <a:spcPts val="956"/>
+              </a:lnSpc>
+            </a:pPr>
+            <a:r>
+              <a:rPr sz="660" b="0">
+                <a:solidFill>
+                  <a:srgbClr val="FFFFFF"/>
+                </a:solidFill>
+                <a:latin typeface="맑은 고딕"/>
+                <a:ea typeface="맑은 고딕"/>
+              </a:rPr>
+              <a:t>name@example.com</a:t>
+            </a:r>
+          </a:p>
+        </p:txBody>
+      </p:sp>
+      <p:sp>
+        <p:nvSpPr>
+          <p:cNvPr id="12" name="텍스트"/>
+          <p:cNvSpPr txBox="1"/>
+          <p:nvPr/>
+        </p:nvSpPr>
+        <p:spPr>
+          <a:xfrm>
+            <a:off x="252000" y="1587600"/>
+            <a:ext cx="331200" cy="99061"/>
+          </a:xfrm>
+          <a:prstGeom prst="rect">
+            <a:avLst/>
+          </a:prstGeom>
+          <a:noFill/>
+        </p:spPr>
+        <p:txBody>
+          <a:bodyPr wrap="square" lIns="0" rIns="0" tIns="0" bIns="0" anchor="t">
+            <a:spAutoFit/>
+          </a:bodyPr>
+          <a:lstStyle/>
+          <a:p>
+            <a:pPr algn="l">
+              <a:lnSpc>
+                <a:spcPts val="754"/>
+              </a:lnSpc>
+            </a:pPr>
+            <a:r>
+              <a:rPr sz="520" b="1" spc="120">
+                <a:solidFill>
+                  <a:srgbClr val="A3A9B5"/>
+                </a:solidFill>
+                <a:latin typeface="맑은 고딕"/>
+                <a:ea typeface="맑은 고딕"/>
+              </a:rPr>
+              <a:t>ADDR</a:t>
+            </a:r>
+          </a:p>
+        </p:txBody>
+      </p:sp>
+      <p:sp>
+        <p:nvSpPr>
+          <p:cNvPr id="13" name="텍스트"/>
+          <p:cNvSpPr txBox="1"/>
+          <p:nvPr/>
+        </p:nvSpPr>
+        <p:spPr>
+          <a:xfrm>
+            <a:off x="583200" y="1576800"/>
+            <a:ext cx="1188000" cy="125731"/>
+          </a:xfrm>
+          <a:prstGeom prst="rect">
+            <a:avLst/>
+          </a:prstGeom>
+          <a:noFill/>
+        </p:spPr>
+        <p:txBody>
+          <a:bodyPr wrap="square" lIns="0" rIns="0" tIns="0" bIns="0" anchor="t">
+            <a:spAutoFit/>
+          </a:bodyPr>
+          <a:lstStyle/>
+          <a:p>
+            <a:pPr algn="l">
+              <a:lnSpc>
+                <a:spcPts val="956"/>
+              </a:lnSpc>
+            </a:pPr>
+            <a:r>
+              <a:rPr sz="660" b="0">
+                <a:solidFill>
+                  <a:srgbClr val="FFFFFF"/>
+                </a:solidFill>
+                <a:latin typeface="맑은 고딕"/>
+                <a:ea typeface="맑은 고딕"/>
+              </a:rPr>
+              <a:t>주소를 입력해 주세요</a:t>
+            </a:r>
           </a:p>
         </p:txBody>
       </p:sp>
@@ -3543,7 +3600,7 @@
     <p:bg>
       <p:bgPr>
         <a:solidFill>
-          <a:srgbClr val="FFFFFF"/>
+          <a:srgbClr val="FF8A7A"/>
         </a:solidFill>
         <a:effectLst/>
       </p:bgPr>
@@ -3557,14 +3614,43 @@
       <p:grpSpPr/>
       <p:sp>
         <p:nvSpPr>
-          <p:cNvPr id="2" name="Freeform 1"/>
+          <p:cNvPr id="2" name="Rectangle 1"/>
           <p:cNvSpPr/>
           <p:nvPr/>
         </p:nvSpPr>
         <p:spPr>
           <a:xfrm>
-            <a:off x="2016000" y="576000"/>
-            <a:ext cx="1224000" cy="1224000"/>
+            <a:off x="0" y="0"/>
+            <a:ext cx="3240000" cy="1800000"/>
+          </a:xfrm>
+          <a:prstGeom prst="rect">
+            <a:avLst/>
+          </a:prstGeom>
+          <a:solidFill>
+            <a:srgbClr val="FFA195"/>
+          </a:solidFill>
+          <a:ln>
+            <a:noFill/>
+          </a:ln>
+        </p:spPr>
+        <p:txBody>
+          <a:bodyPr rtlCol="0" anchor="ctr"/>
+          <a:lstStyle/>
+          <a:p>
+            <a:pPr algn="ctr"/>
+          </a:p>
+        </p:txBody>
+      </p:sp>
+      <p:sp>
+        <p:nvSpPr>
+          <p:cNvPr id="3" name="Freeform 2"/>
+          <p:cNvSpPr/>
+          <p:nvPr/>
+        </p:nvSpPr>
+        <p:spPr>
+          <a:xfrm>
+            <a:off x="2412000" y="972000"/>
+            <a:ext cx="828000" cy="828000"/>
           </a:xfrm>
           <a:custGeom>
             <a:avLst/>
@@ -3573,61 +3659,91 @@
             <a:cxnLst/>
             <a:rect l="l" t="t" r="r" b="b"/>
             <a:pathLst>
-              <a:path w="1224000" h="1224000">
+              <a:path w="828000" h="828000">
                 <a:moveTo>
-                  <a:pt x="1224000" y="1224000"/>
+                  <a:pt x="828000" y="828000"/>
                 </a:moveTo>
                 <a:lnTo>
-                  <a:pt x="0" y="1224000"/>
+                  <a:pt x="0" y="828000"/>
                 </a:lnTo>
                 <a:lnTo>
-                  <a:pt x="7696" y="1086955"/>
+                  <a:pt x="1773" y="773846"/>
                 </a:lnTo>
                 <a:lnTo>
-                  <a:pt x="30688" y="951634"/>
+                  <a:pt x="7084" y="719924"/>
                 </a:lnTo>
                 <a:lnTo>
-                  <a:pt x="68687" y="819738"/>
+                  <a:pt x="15910" y="666465"/>
                 </a:lnTo>
                 <a:lnTo>
-                  <a:pt x="121214" y="692926"/>
+                  <a:pt x="28213" y="613698"/>
                 </a:lnTo>
                 <a:lnTo>
-                  <a:pt x="187610" y="572793"/>
+                  <a:pt x="43942" y="561848"/>
                 </a:lnTo>
                 <a:lnTo>
-                  <a:pt x="267038" y="460848"/>
+                  <a:pt x="63028" y="511138"/>
                 </a:lnTo>
                 <a:lnTo>
-                  <a:pt x="358501" y="358501"/>
+                  <a:pt x="85389" y="461785"/>
                 </a:lnTo>
                 <a:lnTo>
-                  <a:pt x="460848" y="267038"/>
+                  <a:pt x="110931" y="414000"/>
                 </a:lnTo>
                 <a:lnTo>
-                  <a:pt x="572793" y="187610"/>
+                  <a:pt x="139543" y="367988"/>
                 </a:lnTo>
                 <a:lnTo>
-                  <a:pt x="692926" y="121214"/>
+                  <a:pt x="171103" y="323946"/>
                 </a:lnTo>
                 <a:lnTo>
-                  <a:pt x="819738" y="68687"/>
+                  <a:pt x="205477" y="282062"/>
                 </a:lnTo>
                 <a:lnTo>
-                  <a:pt x="951634" y="30688"/>
+                  <a:pt x="242516" y="242516"/>
                 </a:lnTo>
                 <a:lnTo>
-                  <a:pt x="1086955" y="7696"/>
+                  <a:pt x="282062" y="205477"/>
                 </a:lnTo>
                 <a:lnTo>
-                  <a:pt x="1224000" y="0"/>
+                  <a:pt x="323946" y="171103"/>
+                </a:lnTo>
+                <a:lnTo>
+                  <a:pt x="367988" y="139543"/>
+                </a:lnTo>
+                <a:lnTo>
+                  <a:pt x="414000" y="110931"/>
+                </a:lnTo>
+                <a:lnTo>
+                  <a:pt x="461785" y="85389"/>
+                </a:lnTo>
+                <a:lnTo>
+                  <a:pt x="511138" y="63028"/>
+                </a:lnTo>
+                <a:lnTo>
+                  <a:pt x="561848" y="43942"/>
+                </a:lnTo>
+                <a:lnTo>
+                  <a:pt x="613698" y="28213"/>
+                </a:lnTo>
+                <a:lnTo>
+                  <a:pt x="666465" y="15910"/>
+                </a:lnTo>
+                <a:lnTo>
+                  <a:pt x="719924" y="7084"/>
+                </a:lnTo>
+                <a:lnTo>
+                  <a:pt x="773846" y="1773"/>
+                </a:lnTo>
+                <a:lnTo>
+                  <a:pt x="828000" y="0"/>
                 </a:lnTo>
                 <a:close/>
               </a:path>
             </a:pathLst>
           </a:custGeom>
           <a:solidFill>
-            <a:srgbClr val="995229"/>
+            <a:srgbClr val="FFB6AC"/>
           </a:solidFill>
           <a:ln>
             <a:noFill/>
@@ -3643,205 +3759,14 @@
       </p:sp>
       <p:sp>
         <p:nvSpPr>
-          <p:cNvPr id="3" name="Freeform 2"/>
-          <p:cNvSpPr/>
+          <p:cNvPr id="4" name="텍스트"/>
+          <p:cNvSpPr txBox="1"/>
           <p:nvPr/>
         </p:nvSpPr>
         <p:spPr>
           <a:xfrm>
-            <a:off x="2520000" y="1080000"/>
-            <a:ext cx="720000" cy="720000"/>
-          </a:xfrm>
-          <a:custGeom>
-            <a:avLst/>
-            <a:gdLst/>
-            <a:ahLst/>
-            <a:cxnLst/>
-            <a:rect l="l" t="t" r="r" b="b"/>
-            <a:pathLst>
-              <a:path w="720000" h="720000">
-                <a:moveTo>
-                  <a:pt x="720000" y="720000"/>
-                </a:moveTo>
-                <a:lnTo>
-                  <a:pt x="0" y="720000"/>
-                </a:lnTo>
-                <a:lnTo>
-                  <a:pt x="4527" y="639386"/>
-                </a:lnTo>
-                <a:lnTo>
-                  <a:pt x="18052" y="559785"/>
-                </a:lnTo>
-                <a:lnTo>
-                  <a:pt x="40404" y="482199"/>
-                </a:lnTo>
-                <a:lnTo>
-                  <a:pt x="71302" y="407604"/>
-                </a:lnTo>
-                <a:lnTo>
-                  <a:pt x="110359" y="336937"/>
-                </a:lnTo>
-                <a:lnTo>
-                  <a:pt x="157081" y="271087"/>
-                </a:lnTo>
-                <a:lnTo>
-                  <a:pt x="210883" y="210883"/>
-                </a:lnTo>
-                <a:lnTo>
-                  <a:pt x="271087" y="157081"/>
-                </a:lnTo>
-                <a:lnTo>
-                  <a:pt x="336937" y="110359"/>
-                </a:lnTo>
-                <a:lnTo>
-                  <a:pt x="407604" y="71302"/>
-                </a:lnTo>
-                <a:lnTo>
-                  <a:pt x="482199" y="40404"/>
-                </a:lnTo>
-                <a:lnTo>
-                  <a:pt x="559785" y="18052"/>
-                </a:lnTo>
-                <a:lnTo>
-                  <a:pt x="639386" y="4527"/>
-                </a:lnTo>
-                <a:lnTo>
-                  <a:pt x="720000" y="0"/>
-                </a:lnTo>
-                <a:close/>
-              </a:path>
-            </a:pathLst>
-          </a:custGeom>
-          <a:solidFill>
-            <a:srgbClr val="F4DBCD"/>
-          </a:solidFill>
-          <a:ln>
-            <a:noFill/>
-          </a:ln>
-        </p:spPr>
-        <p:txBody>
-          <a:bodyPr rtlCol="0" anchor="ctr"/>
-          <a:lstStyle/>
-          <a:p>
-            <a:pPr algn="ctr"/>
-          </a:p>
-        </p:txBody>
-      </p:sp>
-      <p:sp>
-        <p:nvSpPr>
-          <p:cNvPr id="4" name="Oval 3"/>
-          <p:cNvSpPr/>
-          <p:nvPr/>
-        </p:nvSpPr>
-        <p:spPr>
-          <a:xfrm>
-            <a:off x="2794320" y="1402920"/>
-            <a:ext cx="95760" cy="95760"/>
-          </a:xfrm>
-          <a:prstGeom prst="ellipse">
-            <a:avLst/>
-          </a:prstGeom>
-          <a:solidFill>
-            <a:srgbClr val="FFFFFF"/>
-          </a:solidFill>
-          <a:ln>
-            <a:noFill/>
-          </a:ln>
-        </p:spPr>
-        <p:txBody>
-          <a:bodyPr rtlCol="0" anchor="ctr"/>
-          <a:lstStyle/>
-          <a:p>
-            <a:pPr algn="ctr"/>
-          </a:p>
-        </p:txBody>
-      </p:sp>
-      <p:sp>
-        <p:nvSpPr>
-          <p:cNvPr id="5" name="Oval 4"/>
-          <p:cNvSpPr/>
-          <p:nvPr/>
-        </p:nvSpPr>
-        <p:spPr>
-          <a:xfrm>
-            <a:off x="2869920" y="1402920"/>
-            <a:ext cx="95760" cy="95760"/>
-          </a:xfrm>
-          <a:prstGeom prst="ellipse">
-            <a:avLst/>
-          </a:prstGeom>
-          <a:solidFill>
-            <a:srgbClr val="FFFFFF"/>
-          </a:solidFill>
-          <a:ln>
-            <a:noFill/>
-          </a:ln>
-        </p:spPr>
-        <p:txBody>
-          <a:bodyPr rtlCol="0" anchor="ctr"/>
-          <a:lstStyle/>
-          <a:p>
-            <a:pPr algn="ctr"/>
-          </a:p>
-        </p:txBody>
-      </p:sp>
-      <p:sp>
-        <p:nvSpPr>
-          <p:cNvPr id="6" name="Freeform 5"/>
-          <p:cNvSpPr/>
-          <p:nvPr/>
-        </p:nvSpPr>
-        <p:spPr>
-          <a:xfrm>
-            <a:off x="2796840" y="1470960"/>
-            <a:ext cx="166320" cy="105840"/>
-          </a:xfrm>
-          <a:custGeom>
-            <a:avLst/>
-            <a:gdLst/>
-            <a:ahLst/>
-            <a:cxnLst/>
-            <a:rect l="l" t="t" r="r" b="b"/>
-            <a:pathLst>
-              <a:path w="166320" h="105840">
-                <a:moveTo>
-                  <a:pt x="0" y="0"/>
-                </a:moveTo>
-                <a:lnTo>
-                  <a:pt x="166320" y="0"/>
-                </a:lnTo>
-                <a:lnTo>
-                  <a:pt x="83160" y="105840"/>
-                </a:lnTo>
-                <a:close/>
-              </a:path>
-            </a:pathLst>
-          </a:custGeom>
-          <a:solidFill>
-            <a:srgbClr val="FFFFFF"/>
-          </a:solidFill>
-          <a:ln>
-            <a:noFill/>
-          </a:ln>
-        </p:spPr>
-        <p:txBody>
-          <a:bodyPr rtlCol="0" anchor="ctr"/>
-          <a:lstStyle/>
-          <a:p>
-            <a:pPr algn="ctr"/>
-          </a:p>
-        </p:txBody>
-      </p:sp>
-      <p:sp>
-        <p:nvSpPr>
-          <p:cNvPr id="7" name="텍스트"/>
-          <p:cNvSpPr txBox="1"/>
-          <p:nvPr/>
-        </p:nvSpPr>
-        <p:spPr>
-          <a:xfrm>
-            <a:off x="252000" y="324000"/>
-            <a:ext cx="1944000" cy="720000"/>
+            <a:off x="252000" y="432000"/>
+            <a:ext cx="2304000" cy="720000"/>
           </a:xfrm>
           <a:prstGeom prst="rect">
             <a:avLst/>
@@ -3856,16 +3781,16 @@
           <a:p>
             <a:pPr algn="l">
               <a:lnSpc>
-                <a:spcPts val="1739"/>
+                <a:spcPts val="1884"/>
               </a:lnSpc>
             </a:pPr>
             <a:r>
-              <a:rPr sz="1200" b="1">
+              <a:rPr sz="1300" b="1">
                 <a:solidFill>
-                  <a:srgbClr val="492713"/>
+                  <a:srgbClr val="12151C"/>
                 </a:solidFill>
-                <a:latin typeface="바탕"/>
-                <a:ea typeface="바탕"/>
+                <a:latin typeface="맑은 고딕"/>
+                <a:ea typeface="맑은 고딕"/>
               </a:rPr>
               <a:t>당신의 건강이</a:t>
             </a:r>
@@ -3873,16 +3798,16 @@
           <a:p>
             <a:pPr algn="l">
               <a:lnSpc>
-                <a:spcPts val="1739"/>
+                <a:spcPts val="1884"/>
               </a:lnSpc>
             </a:pPr>
             <a:r>
-              <a:rPr sz="1200" b="1">
+              <a:rPr sz="1300" b="1">
                 <a:solidFill>
-                  <a:srgbClr val="492713"/>
+                  <a:srgbClr val="12151C"/>
                 </a:solidFill>
-                <a:latin typeface="바탕"/>
-                <a:ea typeface="바탕"/>
+                <a:latin typeface="맑은 고딕"/>
+                <a:ea typeface="맑은 고딕"/>
               </a:rPr>
               <a:t>저의 보람입니다</a:t>
             </a:r>
@@ -3891,14 +3816,14 @@
       </p:sp>
       <p:sp>
         <p:nvSpPr>
-          <p:cNvPr id="8" name="텍스트"/>
+          <p:cNvPr id="5" name="텍스트"/>
           <p:cNvSpPr txBox="1"/>
           <p:nvPr/>
         </p:nvSpPr>
         <p:spPr>
           <a:xfrm>
             <a:off x="252000" y="1476000"/>
-            <a:ext cx="1440000" cy="108000"/>
+            <a:ext cx="1800000" cy="133351"/>
           </a:xfrm>
           <a:prstGeom prst="rect">
             <a:avLst/>
@@ -3913,13 +3838,13 @@
           <a:p>
             <a:pPr algn="l">
               <a:lnSpc>
-                <a:spcPts val="1087"/>
+                <a:spcPts val="1015"/>
               </a:lnSpc>
             </a:pPr>
             <a:r>
-              <a:rPr sz="750" b="1" spc="200">
+              <a:rPr sz="700" b="1" spc="200">
                 <a:solidFill>
-                  <a:srgbClr val="826D61"/>
+                  <a:srgbClr val="12151C"/>
                 </a:solidFill>
                 <a:latin typeface="맑은 고딕"/>
                 <a:ea typeface="맑은 고딕"/>

--- a/public/fun/cards/care/care-47.pptx
+++ b/public/fun/cards/care/care-47.pptx
@@ -3105,8 +3105,8 @@
         </p:nvSpPr>
         <p:spPr>
           <a:xfrm>
-            <a:off x="2016000" y="0"/>
-            <a:ext cx="1224000" cy="1800000"/>
+            <a:off x="2124000" y="0"/>
+            <a:ext cx="1116000" cy="1800000"/>
           </a:xfrm>
           <a:custGeom>
             <a:avLst/>
@@ -3115,15 +3115,15 @@
             <a:cxnLst/>
             <a:rect l="l" t="t" r="r" b="b"/>
             <a:pathLst>
-              <a:path w="1224000" h="1800000">
+              <a:path w="1116000" h="1800000">
                 <a:moveTo>
                   <a:pt x="360000" y="0"/>
                 </a:moveTo>
                 <a:lnTo>
-                  <a:pt x="1224000" y="0"/>
+                  <a:pt x="1116000" y="0"/>
                 </a:lnTo>
                 <a:lnTo>
-                  <a:pt x="1224000" y="1800000"/>
+                  <a:pt x="1116000" y="1800000"/>
                 </a:lnTo>
                 <a:lnTo>
                   <a:pt x="0" y="1800000"/>
@@ -3147,66 +3147,79 @@
           </a:p>
         </p:txBody>
       </p:sp>
-      <p:sp>
-        <p:nvSpPr>
-          <p:cNvPr id="3" name="Freeform 2"/>
-          <p:cNvSpPr/>
+      <p:cxnSp>
+        <p:nvCxnSpPr>
+          <p:cNvPr id="3" name="Connector 2"/>
+          <p:cNvCxnSpPr/>
           <p:nvPr/>
-        </p:nvSpPr>
-        <p:spPr>
-          <a:xfrm>
-            <a:off x="1864800" y="0"/>
-            <a:ext cx="460800" cy="1800000"/>
-          </a:xfrm>
-          <a:custGeom>
+        </p:nvCxnSpPr>
+        <p:spPr>
+          <a:xfrm flipH="1">
+            <a:off x="2044800" y="0"/>
+            <a:ext cx="360000" cy="1800000"/>
+          </a:xfrm>
+          <a:prstGeom prst="line">
             <a:avLst/>
-            <a:gdLst/>
-            <a:ahLst/>
-            <a:cxnLst/>
-            <a:rect l="l" t="t" r="r" b="b"/>
-            <a:pathLst>
-              <a:path w="460800" h="1800000">
-                <a:moveTo>
-                  <a:pt x="360000" y="0"/>
-                </a:moveTo>
-                <a:lnTo>
-                  <a:pt x="460800" y="0"/>
-                </a:lnTo>
-                <a:lnTo>
-                  <a:pt x="100800" y="1800000"/>
-                </a:lnTo>
-                <a:lnTo>
-                  <a:pt x="0" y="1800000"/>
-                </a:lnTo>
-                <a:close/>
-              </a:path>
-            </a:pathLst>
-          </a:custGeom>
-          <a:solidFill>
-            <a:srgbClr val="26292D"/>
-          </a:solidFill>
-          <a:ln>
-            <a:noFill/>
+          </a:prstGeom>
+          <a:ln w="3600">
+            <a:solidFill>
+              <a:srgbClr val="26292D"/>
+            </a:solidFill>
           </a:ln>
         </p:spPr>
-        <p:txBody>
-          <a:bodyPr rtlCol="0" anchor="ctr"/>
-          <a:lstStyle/>
-          <a:p>
-            <a:pPr algn="ctr"/>
-          </a:p>
-        </p:txBody>
-      </p:sp>
-      <p:sp>
-        <p:nvSpPr>
-          <p:cNvPr id="4" name="텍스트"/>
+      </p:cxnSp>
+      <p:cxnSp>
+        <p:nvCxnSpPr>
+          <p:cNvPr id="4" name="Connector 3"/>
+          <p:cNvCxnSpPr/>
+          <p:nvPr/>
+        </p:nvCxnSpPr>
+        <p:spPr>
+          <a:xfrm flipH="1">
+            <a:off x="1965600" y="0"/>
+            <a:ext cx="360000" cy="1800000"/>
+          </a:xfrm>
+          <a:prstGeom prst="line">
+            <a:avLst/>
+          </a:prstGeom>
+          <a:ln w="3600">
+            <a:solidFill>
+              <a:srgbClr val="26292D"/>
+            </a:solidFill>
+          </a:ln>
+        </p:spPr>
+      </p:cxnSp>
+      <p:cxnSp>
+        <p:nvCxnSpPr>
+          <p:cNvPr id="5" name="Connector 4"/>
+          <p:cNvCxnSpPr/>
+          <p:nvPr/>
+        </p:nvCxnSpPr>
+        <p:spPr>
+          <a:xfrm flipH="1">
+            <a:off x="1886400" y="0"/>
+            <a:ext cx="360000" cy="1800000"/>
+          </a:xfrm>
+          <a:prstGeom prst="line">
+            <a:avLst/>
+          </a:prstGeom>
+          <a:ln w="3600">
+            <a:solidFill>
+              <a:srgbClr val="26292D"/>
+            </a:solidFill>
+          </a:ln>
+        </p:spPr>
+      </p:cxnSp>
+      <p:sp>
+        <p:nvSpPr>
+          <p:cNvPr id="6" name="텍스트"/>
           <p:cNvSpPr txBox="1"/>
           <p:nvPr/>
         </p:nvSpPr>
         <p:spPr>
           <a:xfrm>
-            <a:off x="252000" y="223200"/>
-            <a:ext cx="1440000" cy="133351"/>
+            <a:off x="252000" y="252000"/>
+            <a:ext cx="1440000" cy="123826"/>
           </a:xfrm>
           <a:prstGeom prst="rect">
             <a:avLst/>
@@ -3221,11 +3234,11 @@
           <a:p>
             <a:pPr algn="l">
               <a:lnSpc>
-                <a:spcPts val="1015"/>
+                <a:spcPts val="942"/>
               </a:lnSpc>
             </a:pPr>
             <a:r>
-              <a:rPr sz="700" b="1" spc="200">
+              <a:rPr sz="650" b="1" spc="220">
                 <a:solidFill>
                   <a:srgbClr val="A3A9B5"/>
                 </a:solidFill>
@@ -3237,16 +3250,37 @@
           </a:p>
         </p:txBody>
       </p:sp>
-      <p:sp>
-        <p:nvSpPr>
-          <p:cNvPr id="5" name="텍스트"/>
+      <p:cxnSp>
+        <p:nvCxnSpPr>
+          <p:cNvPr id="7" name="Connector 6"/>
+          <p:cNvCxnSpPr/>
+          <p:nvPr/>
+        </p:nvCxnSpPr>
+        <p:spPr>
+          <a:xfrm>
+            <a:off x="252000" y="374400"/>
+            <a:ext cx="1260000" cy="0"/>
+          </a:xfrm>
+          <a:prstGeom prst="line">
+            <a:avLst/>
+          </a:prstGeom>
+          <a:ln w="3600">
+            <a:solidFill>
+              <a:srgbClr val="2A2F38"/>
+            </a:solidFill>
+          </a:ln>
+        </p:spPr>
+      </p:cxnSp>
+      <p:sp>
+        <p:nvSpPr>
+          <p:cNvPr id="8" name="텍스트"/>
           <p:cNvSpPr txBox="1"/>
           <p:nvPr/>
         </p:nvSpPr>
         <p:spPr>
           <a:xfrm>
-            <a:off x="252000" y="540000"/>
-            <a:ext cx="1584000" cy="360000"/>
+            <a:off x="252000" y="633600"/>
+            <a:ext cx="1800000" cy="237600"/>
           </a:xfrm>
           <a:prstGeom prst="rect">
             <a:avLst/>
@@ -3261,11 +3295,11 @@
           <a:p>
             <a:pPr algn="l">
               <a:lnSpc>
-                <a:spcPts val="3190"/>
+                <a:spcPts val="1957"/>
               </a:lnSpc>
             </a:pPr>
             <a:r>
-              <a:rPr sz="2200" b="1">
+              <a:rPr sz="1350" b="1" spc="120">
                 <a:solidFill>
                   <a:srgbClr val="FFFFFF"/>
                 </a:solidFill>
@@ -3279,14 +3313,14 @@
       </p:sp>
       <p:sp>
         <p:nvSpPr>
-          <p:cNvPr id="6" name="텍스트"/>
+          <p:cNvPr id="9" name="텍스트"/>
           <p:cNvSpPr txBox="1"/>
           <p:nvPr/>
         </p:nvSpPr>
         <p:spPr>
           <a:xfrm>
-            <a:off x="252000" y="943200"/>
-            <a:ext cx="1584000" cy="171451"/>
+            <a:off x="252000" y="885600"/>
+            <a:ext cx="1800000" cy="133351"/>
           </a:xfrm>
           <a:prstGeom prst="rect">
             <a:avLst/>
@@ -3301,11 +3335,11 @@
           <a:p>
             <a:pPr algn="l">
               <a:lnSpc>
-                <a:spcPts val="1305"/>
+                <a:spcPts val="1015"/>
               </a:lnSpc>
             </a:pPr>
             <a:r>
-              <a:rPr sz="900" b="0">
+              <a:rPr sz="700" b="0" spc="60">
                 <a:solidFill>
                   <a:srgbClr val="A3A9B5"/>
                 </a:solidFill>
@@ -3319,14 +3353,14 @@
       </p:sp>
       <p:sp>
         <p:nvSpPr>
-          <p:cNvPr id="7" name="Rectangle 6"/>
+          <p:cNvPr id="10" name="Rectangle 9"/>
           <p:cNvSpPr/>
           <p:nvPr/>
         </p:nvSpPr>
         <p:spPr>
           <a:xfrm>
-            <a:off x="252000" y="1195200"/>
-            <a:ext cx="144000" cy="18000"/>
+            <a:off x="252000" y="1044000"/>
+            <a:ext cx="129600" cy="14400"/>
           </a:xfrm>
           <a:prstGeom prst="rect">
             <a:avLst/>
@@ -3348,14 +3382,14 @@
       </p:sp>
       <p:sp>
         <p:nvSpPr>
-          <p:cNvPr id="8" name="텍스트"/>
+          <p:cNvPr id="11" name="텍스트"/>
           <p:cNvSpPr txBox="1"/>
           <p:nvPr/>
         </p:nvSpPr>
         <p:spPr>
           <a:xfrm>
-            <a:off x="252000" y="1328400"/>
-            <a:ext cx="331200" cy="99061"/>
+            <a:off x="252000" y="1184400"/>
+            <a:ext cx="324000" cy="91441"/>
           </a:xfrm>
           <a:prstGeom prst="rect">
             <a:avLst/>
@@ -3370,11 +3404,11 @@
           <a:p>
             <a:pPr algn="l">
               <a:lnSpc>
-                <a:spcPts val="754"/>
+                <a:spcPts val="696"/>
               </a:lnSpc>
             </a:pPr>
             <a:r>
-              <a:rPr sz="520" b="1" spc="120">
+              <a:rPr sz="480" b="1" spc="140">
                 <a:solidFill>
                   <a:srgbClr val="A3A9B5"/>
                 </a:solidFill>
@@ -3388,14 +3422,14 @@
       </p:sp>
       <p:sp>
         <p:nvSpPr>
-          <p:cNvPr id="9" name="텍스트"/>
+          <p:cNvPr id="12" name="텍스트"/>
           <p:cNvSpPr txBox="1"/>
           <p:nvPr/>
         </p:nvSpPr>
         <p:spPr>
           <a:xfrm>
-            <a:off x="583200" y="1317600"/>
-            <a:ext cx="1188000" cy="125731"/>
+            <a:off x="576000" y="1173600"/>
+            <a:ext cx="972000" cy="120016"/>
           </a:xfrm>
           <a:prstGeom prst="rect">
             <a:avLst/>
@@ -3410,11 +3444,11 @@
           <a:p>
             <a:pPr algn="l">
               <a:lnSpc>
-                <a:spcPts val="956"/>
+                <a:spcPts val="913"/>
               </a:lnSpc>
             </a:pPr>
             <a:r>
-              <a:rPr sz="660" b="0">
+              <a:rPr sz="630" b="0">
                 <a:solidFill>
                   <a:srgbClr val="FFFFFF"/>
                 </a:solidFill>
@@ -3428,14 +3462,14 @@
       </p:sp>
       <p:sp>
         <p:nvSpPr>
-          <p:cNvPr id="10" name="텍스트"/>
+          <p:cNvPr id="13" name="텍스트"/>
           <p:cNvSpPr txBox="1"/>
           <p:nvPr/>
         </p:nvSpPr>
         <p:spPr>
           <a:xfrm>
-            <a:off x="252000" y="1458000"/>
-            <a:ext cx="331200" cy="99061"/>
+            <a:off x="252000" y="1314000"/>
+            <a:ext cx="324000" cy="91441"/>
           </a:xfrm>
           <a:prstGeom prst="rect">
             <a:avLst/>
@@ -3450,11 +3484,11 @@
           <a:p>
             <a:pPr algn="l">
               <a:lnSpc>
-                <a:spcPts val="754"/>
+                <a:spcPts val="696"/>
               </a:lnSpc>
             </a:pPr>
             <a:r>
-              <a:rPr sz="520" b="1" spc="120">
+              <a:rPr sz="480" b="1" spc="140">
                 <a:solidFill>
                   <a:srgbClr val="A3A9B5"/>
                 </a:solidFill>
@@ -3468,14 +3502,14 @@
       </p:sp>
       <p:sp>
         <p:nvSpPr>
-          <p:cNvPr id="11" name="텍스트"/>
+          <p:cNvPr id="14" name="텍스트"/>
           <p:cNvSpPr txBox="1"/>
           <p:nvPr/>
         </p:nvSpPr>
         <p:spPr>
           <a:xfrm>
-            <a:off x="583200" y="1447200"/>
-            <a:ext cx="1188000" cy="125731"/>
+            <a:off x="576000" y="1303200"/>
+            <a:ext cx="972000" cy="120016"/>
           </a:xfrm>
           <a:prstGeom prst="rect">
             <a:avLst/>
@@ -3490,11 +3524,11 @@
           <a:p>
             <a:pPr algn="l">
               <a:lnSpc>
-                <a:spcPts val="956"/>
+                <a:spcPts val="913"/>
               </a:lnSpc>
             </a:pPr>
             <a:r>
-              <a:rPr sz="660" b="0">
+              <a:rPr sz="630" b="0">
                 <a:solidFill>
                   <a:srgbClr val="FFFFFF"/>
                 </a:solidFill>
@@ -3508,14 +3542,14 @@
       </p:sp>
       <p:sp>
         <p:nvSpPr>
-          <p:cNvPr id="12" name="텍스트"/>
+          <p:cNvPr id="15" name="텍스트"/>
           <p:cNvSpPr txBox="1"/>
           <p:nvPr/>
         </p:nvSpPr>
         <p:spPr>
           <a:xfrm>
-            <a:off x="252000" y="1587600"/>
-            <a:ext cx="331200" cy="99061"/>
+            <a:off x="252000" y="1443600"/>
+            <a:ext cx="324000" cy="91441"/>
           </a:xfrm>
           <a:prstGeom prst="rect">
             <a:avLst/>
@@ -3530,11 +3564,11 @@
           <a:p>
             <a:pPr algn="l">
               <a:lnSpc>
-                <a:spcPts val="754"/>
+                <a:spcPts val="696"/>
               </a:lnSpc>
             </a:pPr>
             <a:r>
-              <a:rPr sz="520" b="1" spc="120">
+              <a:rPr sz="480" b="1" spc="140">
                 <a:solidFill>
                   <a:srgbClr val="A3A9B5"/>
                 </a:solidFill>
@@ -3548,14 +3582,14 @@
       </p:sp>
       <p:sp>
         <p:nvSpPr>
-          <p:cNvPr id="13" name="텍스트"/>
+          <p:cNvPr id="16" name="텍스트"/>
           <p:cNvSpPr txBox="1"/>
           <p:nvPr/>
         </p:nvSpPr>
         <p:spPr>
           <a:xfrm>
-            <a:off x="583200" y="1576800"/>
-            <a:ext cx="1188000" cy="125731"/>
+            <a:off x="576000" y="1432800"/>
+            <a:ext cx="972000" cy="120016"/>
           </a:xfrm>
           <a:prstGeom prst="rect">
             <a:avLst/>
@@ -3570,11 +3604,11 @@
           <a:p>
             <a:pPr algn="l">
               <a:lnSpc>
-                <a:spcPts val="956"/>
+                <a:spcPts val="913"/>
               </a:lnSpc>
             </a:pPr>
             <a:r>
-              <a:rPr sz="660" b="0">
+              <a:rPr sz="630" b="0">
                 <a:solidFill>
                   <a:srgbClr val="FFFFFF"/>
                 </a:solidFill>
@@ -3614,14 +3648,508 @@
       <p:grpSpPr/>
       <p:sp>
         <p:nvSpPr>
-          <p:cNvPr id="2" name="Rectangle 1"/>
+          <p:cNvPr id="2" name="텍스트"/>
+          <p:cNvSpPr txBox="1"/>
+          <p:nvPr/>
+        </p:nvSpPr>
+        <p:spPr>
+          <a:xfrm>
+            <a:off x="252000" y="252000"/>
+            <a:ext cx="1080000" cy="99061"/>
+          </a:xfrm>
+          <a:prstGeom prst="rect">
+            <a:avLst/>
+          </a:prstGeom>
+          <a:noFill/>
+        </p:spPr>
+        <p:txBody>
+          <a:bodyPr wrap="square" lIns="0" rIns="0" tIns="0" bIns="0" anchor="t">
+            <a:spAutoFit/>
+          </a:bodyPr>
+          <a:lstStyle/>
+          <a:p>
+            <a:pPr algn="l">
+              <a:lnSpc>
+                <a:spcPts val="754"/>
+              </a:lnSpc>
+            </a:pPr>
+            <a:r>
+              <a:rPr sz="520" b="1" spc="240">
+                <a:solidFill>
+                  <a:srgbClr val="462F31"/>
+                </a:solidFill>
+                <a:latin typeface="맑은 고딕"/>
+                <a:ea typeface="맑은 고딕"/>
+              </a:rPr>
+              <a:t>진료 · 상담</a:t>
+            </a:r>
+          </a:p>
+        </p:txBody>
+      </p:sp>
+      <p:sp>
+        <p:nvSpPr>
+          <p:cNvPr id="3" name="Rectangle 2"/>
           <p:cNvSpPr/>
           <p:nvPr/>
         </p:nvSpPr>
         <p:spPr>
           <a:xfrm>
-            <a:off x="0" y="0"/>
-            <a:ext cx="3240000" cy="1800000"/>
+            <a:off x="252000" y="352800"/>
+            <a:ext cx="108000" cy="14400"/>
+          </a:xfrm>
+          <a:prstGeom prst="rect">
+            <a:avLst/>
+          </a:prstGeom>
+          <a:solidFill>
+            <a:srgbClr val="12151C"/>
+          </a:solidFill>
+          <a:ln>
+            <a:noFill/>
+          </a:ln>
+        </p:spPr>
+        <p:txBody>
+          <a:bodyPr rtlCol="0" anchor="ctr"/>
+          <a:lstStyle/>
+          <a:p>
+            <a:pPr algn="ctr"/>
+          </a:p>
+        </p:txBody>
+      </p:sp>
+      <p:cxnSp>
+        <p:nvCxnSpPr>
+          <p:cNvPr id="4" name="Connector 3"/>
+          <p:cNvCxnSpPr/>
+          <p:nvPr/>
+        </p:nvCxnSpPr>
+        <p:spPr>
+          <a:xfrm>
+            <a:off x="252000" y="453600"/>
+            <a:ext cx="1512000" cy="0"/>
+          </a:xfrm>
+          <a:prstGeom prst="line">
+            <a:avLst/>
+          </a:prstGeom>
+          <a:ln w="3600">
+            <a:solidFill>
+              <a:srgbClr val="A05B54"/>
+            </a:solidFill>
+          </a:ln>
+        </p:spPr>
+      </p:cxnSp>
+      <p:sp>
+        <p:nvSpPr>
+          <p:cNvPr id="5" name="텍스트"/>
+          <p:cNvSpPr txBox="1"/>
+          <p:nvPr/>
+        </p:nvSpPr>
+        <p:spPr>
+          <a:xfrm>
+            <a:off x="252000" y="507600"/>
+            <a:ext cx="216000" cy="95251"/>
+          </a:xfrm>
+          <a:prstGeom prst="rect">
+            <a:avLst/>
+          </a:prstGeom>
+          <a:noFill/>
+        </p:spPr>
+        <p:txBody>
+          <a:bodyPr wrap="square" lIns="0" rIns="0" tIns="0" bIns="0" anchor="t">
+            <a:spAutoFit/>
+          </a:bodyPr>
+          <a:lstStyle/>
+          <a:p>
+            <a:pPr algn="l">
+              <a:lnSpc>
+                <a:spcPts val="725"/>
+              </a:lnSpc>
+            </a:pPr>
+            <a:r>
+              <a:rPr sz="500" b="1" spc="100">
+                <a:solidFill>
+                  <a:srgbClr val="462F31"/>
+                </a:solidFill>
+                <a:latin typeface="맑은 고딕"/>
+                <a:ea typeface="맑은 고딕"/>
+              </a:rPr>
+              <a:t>01</a:t>
+            </a:r>
+          </a:p>
+        </p:txBody>
+      </p:sp>
+      <p:sp>
+        <p:nvSpPr>
+          <p:cNvPr id="6" name="텍스트"/>
+          <p:cNvSpPr txBox="1"/>
+          <p:nvPr/>
+        </p:nvSpPr>
+        <p:spPr>
+          <a:xfrm>
+            <a:off x="489600" y="496800"/>
+            <a:ext cx="1260000" cy="133351"/>
+          </a:xfrm>
+          <a:prstGeom prst="rect">
+            <a:avLst/>
+          </a:prstGeom>
+          <a:noFill/>
+        </p:spPr>
+        <p:txBody>
+          <a:bodyPr wrap="square" lIns="0" rIns="0" tIns="0" bIns="0" anchor="t">
+            <a:spAutoFit/>
+          </a:bodyPr>
+          <a:lstStyle/>
+          <a:p>
+            <a:pPr algn="l">
+              <a:lnSpc>
+                <a:spcPts val="1015"/>
+              </a:lnSpc>
+            </a:pPr>
+            <a:r>
+              <a:rPr sz="700" b="0">
+                <a:solidFill>
+                  <a:srgbClr val="12151C"/>
+                </a:solidFill>
+                <a:latin typeface="맑은 고딕"/>
+                <a:ea typeface="맑은 고딕"/>
+              </a:rPr>
+              <a:t>복약 상담</a:t>
+            </a:r>
+          </a:p>
+        </p:txBody>
+      </p:sp>
+      <p:cxnSp>
+        <p:nvCxnSpPr>
+          <p:cNvPr id="7" name="Connector 6"/>
+          <p:cNvCxnSpPr/>
+          <p:nvPr/>
+        </p:nvCxnSpPr>
+        <p:spPr>
+          <a:xfrm>
+            <a:off x="252000" y="640800"/>
+            <a:ext cx="1512000" cy="0"/>
+          </a:xfrm>
+          <a:prstGeom prst="line">
+            <a:avLst/>
+          </a:prstGeom>
+          <a:ln w="3600">
+            <a:solidFill>
+              <a:srgbClr val="A05B54"/>
+            </a:solidFill>
+          </a:ln>
+        </p:spPr>
+      </p:cxnSp>
+      <p:sp>
+        <p:nvSpPr>
+          <p:cNvPr id="8" name="텍스트"/>
+          <p:cNvSpPr txBox="1"/>
+          <p:nvPr/>
+        </p:nvSpPr>
+        <p:spPr>
+          <a:xfrm>
+            <a:off x="252000" y="694800"/>
+            <a:ext cx="216000" cy="95251"/>
+          </a:xfrm>
+          <a:prstGeom prst="rect">
+            <a:avLst/>
+          </a:prstGeom>
+          <a:noFill/>
+        </p:spPr>
+        <p:txBody>
+          <a:bodyPr wrap="square" lIns="0" rIns="0" tIns="0" bIns="0" anchor="t">
+            <a:spAutoFit/>
+          </a:bodyPr>
+          <a:lstStyle/>
+          <a:p>
+            <a:pPr algn="l">
+              <a:lnSpc>
+                <a:spcPts val="725"/>
+              </a:lnSpc>
+            </a:pPr>
+            <a:r>
+              <a:rPr sz="500" b="1" spc="100">
+                <a:solidFill>
+                  <a:srgbClr val="462F31"/>
+                </a:solidFill>
+                <a:latin typeface="맑은 고딕"/>
+                <a:ea typeface="맑은 고딕"/>
+              </a:rPr>
+              <a:t>02</a:t>
+            </a:r>
+          </a:p>
+        </p:txBody>
+      </p:sp>
+      <p:sp>
+        <p:nvSpPr>
+          <p:cNvPr id="9" name="텍스트"/>
+          <p:cNvSpPr txBox="1"/>
+          <p:nvPr/>
+        </p:nvSpPr>
+        <p:spPr>
+          <a:xfrm>
+            <a:off x="489600" y="684000"/>
+            <a:ext cx="1260000" cy="133351"/>
+          </a:xfrm>
+          <a:prstGeom prst="rect">
+            <a:avLst/>
+          </a:prstGeom>
+          <a:noFill/>
+        </p:spPr>
+        <p:txBody>
+          <a:bodyPr wrap="square" lIns="0" rIns="0" tIns="0" bIns="0" anchor="t">
+            <a:spAutoFit/>
+          </a:bodyPr>
+          <a:lstStyle/>
+          <a:p>
+            <a:pPr algn="l">
+              <a:lnSpc>
+                <a:spcPts val="1015"/>
+              </a:lnSpc>
+            </a:pPr>
+            <a:r>
+              <a:rPr sz="700" b="0">
+                <a:solidFill>
+                  <a:srgbClr val="12151C"/>
+                </a:solidFill>
+                <a:latin typeface="맑은 고딕"/>
+                <a:ea typeface="맑은 고딕"/>
+              </a:rPr>
+              <a:t>물리 치료</a:t>
+            </a:r>
+          </a:p>
+        </p:txBody>
+      </p:sp>
+      <p:cxnSp>
+        <p:nvCxnSpPr>
+          <p:cNvPr id="10" name="Connector 9"/>
+          <p:cNvCxnSpPr/>
+          <p:nvPr/>
+        </p:nvCxnSpPr>
+        <p:spPr>
+          <a:xfrm>
+            <a:off x="252000" y="828000"/>
+            <a:ext cx="1512000" cy="0"/>
+          </a:xfrm>
+          <a:prstGeom prst="line">
+            <a:avLst/>
+          </a:prstGeom>
+          <a:ln w="3600">
+            <a:solidFill>
+              <a:srgbClr val="A05B54"/>
+            </a:solidFill>
+          </a:ln>
+        </p:spPr>
+      </p:cxnSp>
+      <p:sp>
+        <p:nvSpPr>
+          <p:cNvPr id="11" name="텍스트"/>
+          <p:cNvSpPr txBox="1"/>
+          <p:nvPr/>
+        </p:nvSpPr>
+        <p:spPr>
+          <a:xfrm>
+            <a:off x="252000" y="882000"/>
+            <a:ext cx="216000" cy="95251"/>
+          </a:xfrm>
+          <a:prstGeom prst="rect">
+            <a:avLst/>
+          </a:prstGeom>
+          <a:noFill/>
+        </p:spPr>
+        <p:txBody>
+          <a:bodyPr wrap="square" lIns="0" rIns="0" tIns="0" bIns="0" anchor="t">
+            <a:spAutoFit/>
+          </a:bodyPr>
+          <a:lstStyle/>
+          <a:p>
+            <a:pPr algn="l">
+              <a:lnSpc>
+                <a:spcPts val="725"/>
+              </a:lnSpc>
+            </a:pPr>
+            <a:r>
+              <a:rPr sz="500" b="1" spc="100">
+                <a:solidFill>
+                  <a:srgbClr val="462F31"/>
+                </a:solidFill>
+                <a:latin typeface="맑은 고딕"/>
+                <a:ea typeface="맑은 고딕"/>
+              </a:rPr>
+              <a:t>03</a:t>
+            </a:r>
+          </a:p>
+        </p:txBody>
+      </p:sp>
+      <p:sp>
+        <p:nvSpPr>
+          <p:cNvPr id="12" name="텍스트"/>
+          <p:cNvSpPr txBox="1"/>
+          <p:nvPr/>
+        </p:nvSpPr>
+        <p:spPr>
+          <a:xfrm>
+            <a:off x="489600" y="871200"/>
+            <a:ext cx="1260000" cy="133351"/>
+          </a:xfrm>
+          <a:prstGeom prst="rect">
+            <a:avLst/>
+          </a:prstGeom>
+          <a:noFill/>
+        </p:spPr>
+        <p:txBody>
+          <a:bodyPr wrap="square" lIns="0" rIns="0" tIns="0" bIns="0" anchor="t">
+            <a:spAutoFit/>
+          </a:bodyPr>
+          <a:lstStyle/>
+          <a:p>
+            <a:pPr algn="l">
+              <a:lnSpc>
+                <a:spcPts val="1015"/>
+              </a:lnSpc>
+            </a:pPr>
+            <a:r>
+              <a:rPr sz="700" b="0">
+                <a:solidFill>
+                  <a:srgbClr val="12151C"/>
+                </a:solidFill>
+                <a:latin typeface="맑은 고딕"/>
+                <a:ea typeface="맑은 고딕"/>
+              </a:rPr>
+              <a:t>치아 관리</a:t>
+            </a:r>
+          </a:p>
+        </p:txBody>
+      </p:sp>
+      <p:cxnSp>
+        <p:nvCxnSpPr>
+          <p:cNvPr id="13" name="Connector 12"/>
+          <p:cNvCxnSpPr/>
+          <p:nvPr/>
+        </p:nvCxnSpPr>
+        <p:spPr>
+          <a:xfrm>
+            <a:off x="252000" y="1015200"/>
+            <a:ext cx="1512000" cy="0"/>
+          </a:xfrm>
+          <a:prstGeom prst="line">
+            <a:avLst/>
+          </a:prstGeom>
+          <a:ln w="3600">
+            <a:solidFill>
+              <a:srgbClr val="A05B54"/>
+            </a:solidFill>
+          </a:ln>
+        </p:spPr>
+      </p:cxnSp>
+      <p:sp>
+        <p:nvSpPr>
+          <p:cNvPr id="14" name="텍스트"/>
+          <p:cNvSpPr txBox="1"/>
+          <p:nvPr/>
+        </p:nvSpPr>
+        <p:spPr>
+          <a:xfrm>
+            <a:off x="252000" y="1069200"/>
+            <a:ext cx="216000" cy="95251"/>
+          </a:xfrm>
+          <a:prstGeom prst="rect">
+            <a:avLst/>
+          </a:prstGeom>
+          <a:noFill/>
+        </p:spPr>
+        <p:txBody>
+          <a:bodyPr wrap="square" lIns="0" rIns="0" tIns="0" bIns="0" anchor="t">
+            <a:spAutoFit/>
+          </a:bodyPr>
+          <a:lstStyle/>
+          <a:p>
+            <a:pPr algn="l">
+              <a:lnSpc>
+                <a:spcPts val="725"/>
+              </a:lnSpc>
+            </a:pPr>
+            <a:r>
+              <a:rPr sz="500" b="1" spc="100">
+                <a:solidFill>
+                  <a:srgbClr val="462F31"/>
+                </a:solidFill>
+                <a:latin typeface="맑은 고딕"/>
+                <a:ea typeface="맑은 고딕"/>
+              </a:rPr>
+              <a:t>04</a:t>
+            </a:r>
+          </a:p>
+        </p:txBody>
+      </p:sp>
+      <p:sp>
+        <p:nvSpPr>
+          <p:cNvPr id="15" name="텍스트"/>
+          <p:cNvSpPr txBox="1"/>
+          <p:nvPr/>
+        </p:nvSpPr>
+        <p:spPr>
+          <a:xfrm>
+            <a:off x="489600" y="1058400"/>
+            <a:ext cx="1260000" cy="133351"/>
+          </a:xfrm>
+          <a:prstGeom prst="rect">
+            <a:avLst/>
+          </a:prstGeom>
+          <a:noFill/>
+        </p:spPr>
+        <p:txBody>
+          <a:bodyPr wrap="square" lIns="0" rIns="0" tIns="0" bIns="0" anchor="t">
+            <a:spAutoFit/>
+          </a:bodyPr>
+          <a:lstStyle/>
+          <a:p>
+            <a:pPr algn="l">
+              <a:lnSpc>
+                <a:spcPts val="1015"/>
+              </a:lnSpc>
+            </a:pPr>
+            <a:r>
+              <a:rPr sz="700" b="0">
+                <a:solidFill>
+                  <a:srgbClr val="12151C"/>
+                </a:solidFill>
+                <a:latin typeface="맑은 고딕"/>
+                <a:ea typeface="맑은 고딕"/>
+              </a:rPr>
+              <a:t>건강 상담</a:t>
+            </a:r>
+          </a:p>
+        </p:txBody>
+      </p:sp>
+      <p:cxnSp>
+        <p:nvCxnSpPr>
+          <p:cNvPr id="16" name="Connector 15"/>
+          <p:cNvCxnSpPr/>
+          <p:nvPr/>
+        </p:nvCxnSpPr>
+        <p:spPr>
+          <a:xfrm>
+            <a:off x="252000" y="1202400"/>
+            <a:ext cx="1512000" cy="0"/>
+          </a:xfrm>
+          <a:prstGeom prst="line">
+            <a:avLst/>
+          </a:prstGeom>
+          <a:ln w="3600">
+            <a:solidFill>
+              <a:srgbClr val="A05B54"/>
+            </a:solidFill>
+          </a:ln>
+        </p:spPr>
+      </p:cxnSp>
+      <p:sp>
+        <p:nvSpPr>
+          <p:cNvPr id="17" name="Rectangle 16"/>
+          <p:cNvSpPr/>
+          <p:nvPr/>
+        </p:nvSpPr>
+        <p:spPr>
+          <a:xfrm>
+            <a:off x="2088000" y="252000"/>
+            <a:ext cx="900000" cy="1296000"/>
           </a:xfrm>
           <a:prstGeom prst="rect">
             <a:avLst/>
@@ -3643,130 +4171,14 @@
       </p:sp>
       <p:sp>
         <p:nvSpPr>
-          <p:cNvPr id="3" name="Freeform 2"/>
-          <p:cNvSpPr/>
-          <p:nvPr/>
-        </p:nvSpPr>
-        <p:spPr>
-          <a:xfrm>
-            <a:off x="2412000" y="972000"/>
-            <a:ext cx="828000" cy="828000"/>
-          </a:xfrm>
-          <a:custGeom>
-            <a:avLst/>
-            <a:gdLst/>
-            <a:ahLst/>
-            <a:cxnLst/>
-            <a:rect l="l" t="t" r="r" b="b"/>
-            <a:pathLst>
-              <a:path w="828000" h="828000">
-                <a:moveTo>
-                  <a:pt x="828000" y="828000"/>
-                </a:moveTo>
-                <a:lnTo>
-                  <a:pt x="0" y="828000"/>
-                </a:lnTo>
-                <a:lnTo>
-                  <a:pt x="1773" y="773846"/>
-                </a:lnTo>
-                <a:lnTo>
-                  <a:pt x="7084" y="719924"/>
-                </a:lnTo>
-                <a:lnTo>
-                  <a:pt x="15910" y="666465"/>
-                </a:lnTo>
-                <a:lnTo>
-                  <a:pt x="28213" y="613698"/>
-                </a:lnTo>
-                <a:lnTo>
-                  <a:pt x="43942" y="561848"/>
-                </a:lnTo>
-                <a:lnTo>
-                  <a:pt x="63028" y="511138"/>
-                </a:lnTo>
-                <a:lnTo>
-                  <a:pt x="85389" y="461785"/>
-                </a:lnTo>
-                <a:lnTo>
-                  <a:pt x="110931" y="414000"/>
-                </a:lnTo>
-                <a:lnTo>
-                  <a:pt x="139543" y="367988"/>
-                </a:lnTo>
-                <a:lnTo>
-                  <a:pt x="171103" y="323946"/>
-                </a:lnTo>
-                <a:lnTo>
-                  <a:pt x="205477" y="282062"/>
-                </a:lnTo>
-                <a:lnTo>
-                  <a:pt x="242516" y="242516"/>
-                </a:lnTo>
-                <a:lnTo>
-                  <a:pt x="282062" y="205477"/>
-                </a:lnTo>
-                <a:lnTo>
-                  <a:pt x="323946" y="171103"/>
-                </a:lnTo>
-                <a:lnTo>
-                  <a:pt x="367988" y="139543"/>
-                </a:lnTo>
-                <a:lnTo>
-                  <a:pt x="414000" y="110931"/>
-                </a:lnTo>
-                <a:lnTo>
-                  <a:pt x="461785" y="85389"/>
-                </a:lnTo>
-                <a:lnTo>
-                  <a:pt x="511138" y="63028"/>
-                </a:lnTo>
-                <a:lnTo>
-                  <a:pt x="561848" y="43942"/>
-                </a:lnTo>
-                <a:lnTo>
-                  <a:pt x="613698" y="28213"/>
-                </a:lnTo>
-                <a:lnTo>
-                  <a:pt x="666465" y="15910"/>
-                </a:lnTo>
-                <a:lnTo>
-                  <a:pt x="719924" y="7084"/>
-                </a:lnTo>
-                <a:lnTo>
-                  <a:pt x="773846" y="1773"/>
-                </a:lnTo>
-                <a:lnTo>
-                  <a:pt x="828000" y="0"/>
-                </a:lnTo>
-                <a:close/>
-              </a:path>
-            </a:pathLst>
-          </a:custGeom>
-          <a:solidFill>
-            <a:srgbClr val="FFB6AC"/>
-          </a:solidFill>
-          <a:ln>
-            <a:noFill/>
-          </a:ln>
-        </p:spPr>
-        <p:txBody>
-          <a:bodyPr rtlCol="0" anchor="ctr"/>
-          <a:lstStyle/>
-          <a:p>
-            <a:pPr algn="ctr"/>
-          </a:p>
-        </p:txBody>
-      </p:sp>
-      <p:sp>
-        <p:nvSpPr>
-          <p:cNvPr id="4" name="텍스트"/>
+          <p:cNvPr id="18" name="텍스트"/>
           <p:cNvSpPr txBox="1"/>
           <p:nvPr/>
         </p:nvSpPr>
         <p:spPr>
           <a:xfrm>
-            <a:off x="252000" y="432000"/>
-            <a:ext cx="2304000" cy="720000"/>
+            <a:off x="2196000" y="360000"/>
+            <a:ext cx="684000" cy="95251"/>
           </a:xfrm>
           <a:prstGeom prst="rect">
             <a:avLst/>
@@ -3781,49 +4193,177 @@
           <a:p>
             <a:pPr algn="l">
               <a:lnSpc>
-                <a:spcPts val="1884"/>
+                <a:spcPts val="725"/>
               </a:lnSpc>
             </a:pPr>
             <a:r>
-              <a:rPr sz="1300" b="1">
+              <a:rPr sz="500" b="1" spc="240">
+                <a:solidFill>
+                  <a:srgbClr val="12151C">
+                    <a:alpha val="75000"/>
+                  </a:srgbClr>
+                </a:solidFill>
+                <a:latin typeface="맑은 고딕"/>
+                <a:ea typeface="맑은 고딕"/>
+              </a:rPr>
+              <a:t>INFO</a:t>
+            </a:r>
+          </a:p>
+        </p:txBody>
+      </p:sp>
+      <p:sp>
+        <p:nvSpPr>
+          <p:cNvPr id="19" name="텍스트"/>
+          <p:cNvSpPr txBox="1"/>
+          <p:nvPr/>
+        </p:nvSpPr>
+        <p:spPr>
+          <a:xfrm>
+            <a:off x="2196000" y="504000"/>
+            <a:ext cx="684000" cy="121921"/>
+          </a:xfrm>
+          <a:prstGeom prst="rect">
+            <a:avLst/>
+          </a:prstGeom>
+          <a:noFill/>
+        </p:spPr>
+        <p:txBody>
+          <a:bodyPr wrap="square" lIns="0" rIns="0" tIns="0" bIns="0" anchor="t">
+            <a:spAutoFit/>
+          </a:bodyPr>
+          <a:lstStyle/>
+          <a:p>
+            <a:pPr algn="l">
+              <a:lnSpc>
+                <a:spcPts val="927"/>
+              </a:lnSpc>
+            </a:pPr>
+            <a:r>
+              <a:rPr sz="640" b="1">
                 <a:solidFill>
                   <a:srgbClr val="12151C"/>
                 </a:solidFill>
                 <a:latin typeface="맑은 고딕"/>
                 <a:ea typeface="맑은 고딕"/>
               </a:rPr>
-              <a:t>당신의 건강이</a:t>
-            </a:r>
-          </a:p>
+              <a:t>월–금 09:30 – 18:30</a:t>
+            </a:r>
+          </a:p>
+        </p:txBody>
+      </p:sp>
+      <p:cxnSp>
+        <p:nvCxnSpPr>
+          <p:cNvPr id="20" name="Connector 19"/>
+          <p:cNvCxnSpPr/>
+          <p:nvPr/>
+        </p:nvCxnSpPr>
+        <p:spPr>
+          <a:xfrm>
+            <a:off x="2196000" y="770400"/>
+            <a:ext cx="684000" cy="0"/>
+          </a:xfrm>
+          <a:prstGeom prst="line">
+            <a:avLst/>
+          </a:prstGeom>
+          <a:ln w="3600">
+            <a:solidFill>
+              <a:srgbClr val="12151C"/>
+            </a:solidFill>
+          </a:ln>
+        </p:spPr>
+      </p:cxnSp>
+      <p:sp>
+        <p:nvSpPr>
+          <p:cNvPr id="21" name="텍스트"/>
+          <p:cNvSpPr txBox="1"/>
+          <p:nvPr/>
+        </p:nvSpPr>
+        <p:spPr>
+          <a:xfrm>
+            <a:off x="2196000" y="849600"/>
+            <a:ext cx="684000" cy="91441"/>
+          </a:xfrm>
+          <a:prstGeom prst="rect">
+            <a:avLst/>
+          </a:prstGeom>
+          <a:noFill/>
+        </p:spPr>
+        <p:txBody>
+          <a:bodyPr wrap="square" lIns="0" rIns="0" tIns="0" bIns="0" anchor="t">
+            <a:spAutoFit/>
+          </a:bodyPr>
+          <a:lstStyle/>
           <a:p>
             <a:pPr algn="l">
               <a:lnSpc>
-                <a:spcPts val="1884"/>
+                <a:spcPts val="696"/>
               </a:lnSpc>
             </a:pPr>
             <a:r>
-              <a:rPr sz="1300" b="1">
+              <a:rPr sz="480" b="1" spc="140">
+                <a:solidFill>
+                  <a:srgbClr val="12151C">
+                    <a:alpha val="75000"/>
+                  </a:srgbClr>
+                </a:solidFill>
+                <a:latin typeface="맑은 고딕"/>
+                <a:ea typeface="맑은 고딕"/>
+              </a:rPr>
+              <a:t>INSTAGRAM</a:t>
+            </a:r>
+          </a:p>
+        </p:txBody>
+      </p:sp>
+      <p:sp>
+        <p:nvSpPr>
+          <p:cNvPr id="22" name="텍스트"/>
+          <p:cNvSpPr txBox="1"/>
+          <p:nvPr/>
+        </p:nvSpPr>
+        <p:spPr>
+          <a:xfrm>
+            <a:off x="2196000" y="957600"/>
+            <a:ext cx="684000" cy="121921"/>
+          </a:xfrm>
+          <a:prstGeom prst="rect">
+            <a:avLst/>
+          </a:prstGeom>
+          <a:noFill/>
+        </p:spPr>
+        <p:txBody>
+          <a:bodyPr wrap="square" lIns="0" rIns="0" tIns="0" bIns="0" anchor="t">
+            <a:spAutoFit/>
+          </a:bodyPr>
+          <a:lstStyle/>
+          <a:p>
+            <a:pPr algn="l">
+              <a:lnSpc>
+                <a:spcPts val="927"/>
+              </a:lnSpc>
+            </a:pPr>
+            <a:r>
+              <a:rPr sz="640" b="1">
                 <a:solidFill>
                   <a:srgbClr val="12151C"/>
                 </a:solidFill>
                 <a:latin typeface="맑은 고딕"/>
                 <a:ea typeface="맑은 고딕"/>
               </a:rPr>
-              <a:t>저의 보람입니다</a:t>
-            </a:r>
-          </a:p>
-        </p:txBody>
-      </p:sp>
-      <p:sp>
-        <p:nvSpPr>
-          <p:cNvPr id="5" name="텍스트"/>
+              <a:t>@아이디</a:t>
+            </a:r>
+          </a:p>
+        </p:txBody>
+      </p:sp>
+      <p:sp>
+        <p:nvSpPr>
+          <p:cNvPr id="23" name="텍스트"/>
           <p:cNvSpPr txBox="1"/>
           <p:nvPr/>
         </p:nvSpPr>
         <p:spPr>
           <a:xfrm>
-            <a:off x="252000" y="1476000"/>
-            <a:ext cx="1800000" cy="133351"/>
+            <a:off x="2196000" y="1368000"/>
+            <a:ext cx="720000" cy="106681"/>
           </a:xfrm>
           <a:prstGeom prst="rect">
             <a:avLst/>
@@ -3838,11 +4378,11 @@
           <a:p>
             <a:pPr algn="l">
               <a:lnSpc>
-                <a:spcPts val="1015"/>
+                <a:spcPts val="811"/>
               </a:lnSpc>
             </a:pPr>
             <a:r>
-              <a:rPr sz="700" b="1" spc="200">
+              <a:rPr sz="560" b="1" spc="80">
                 <a:solidFill>
                   <a:srgbClr val="12151C"/>
                 </a:solidFill>
